--- a/pptx-output/05-notebooks-sql-and-pipelines-with-copilot.pptx
+++ b/pptx-output/05-notebooks-sql-and-pipelines-with-copilot.pptx
@@ -1224,7 +1224,7 @@
           <a:lstStyle/>
           <a:p>
             <a:r>
-              <a:t>Tie this to DS and analytics workflows where notebook execution context is often incomplete.</a:t>
+              <a:t>The AI added config comments, explicit seasonality flags, and a shape check. Ask: is weekly seasonality really irrelevant for your data? Is 12 months the right forecast window? The AI made reasonable defaults, but the data scientist must confirm they match the experiment design.</a:t>
             </a:r>
           </a:p>
         </p:txBody>
@@ -1294,7 +1294,7 @@
           <a:lstStyle/>
           <a:p>
             <a:r>
-              <a:t>Make it clear that optimization without business validation is not acceptable.</a:t>
+              <a:t>The AI added a business-definition comment, a prior-month column for context, a percentage calculation, and a divide-by-zero guard. Ask: does your team want the percentage column, or does it create confusion in the dashboard? More columns are not always better. The BI analyst must decide what the end report actually needs.</a:t>
             </a:r>
           </a:p>
         </p:txBody>
@@ -1364,7 +1364,7 @@
           <a:lstStyle/>
           <a:p>
             <a:r>
-              <a:t>Operational reliability is the main risk here.</a:t>
+              <a:t>The AI replaced `SELECT *` with explicit columns, added a date filter with a 3-day lookback, date-partitioned the sink path, and added retry and timeout policies. Ask: is 3 days the right window? Does your team use date-partitioned paths? The changes look professional but every parameter needs validation against the actual pipeline SLA.</a:t>
             </a:r>
           </a:p>
         </p:txBody>
@@ -10904,7 +10904,7 @@
                 </a:solidFill>
                 <a:latin typeface="Segoe UI"/>
               </a:rPr>
-              <a:t>Notebook Workflow</a:t>
+              <a:t>Notebook Workflow (DS) -- Before And After</a:t>
             </a:r>
           </a:p>
         </p:txBody>
@@ -11033,7 +11033,7 @@
                 </a:solidFill>
                 <a:latin typeface="Segoe UI"/>
               </a:rPr>
-              <a:t>summarize a forecasting notebook workflow</a:t>
+              <a:t>Scenario: Copilot improves a forecasting notebook cell. Review before running.</a:t>
             </a:r>
           </a:p>
           <a:p>
@@ -11061,7 +11061,7 @@
                 </a:solidFill>
                 <a:latin typeface="Segoe UI"/>
               </a:rPr>
-              <a:t>find environment, seed, and data snapshot gaps</a:t>
+              <a:t>Review: Are the **data version**, **seasonality settings**, and **horizon** correct?</a:t>
             </a:r>
           </a:p>
           <a:p>
@@ -11089,7 +11089,7 @@
                 </a:solidFill>
                 <a:latin typeface="Segoe UI"/>
               </a:rPr>
-              <a:t>add a rerun checklist</a:t>
+              <a:t>Decision: Keep, Revise, or Reject?</a:t>
             </a:r>
           </a:p>
         </p:txBody>
@@ -11207,7 +11207,7 @@
                 </a:solidFill>
                 <a:latin typeface="Segoe UI"/>
               </a:rPr>
-              <a:t>Tie this to DS and analytics workflows where notebook execution context is often incomplete.</a:t>
+              <a:t>The AI added config comments, explicit seasonality flags, and a shape check. Ask: is weekly seasonality really irrelevant for your data? Is 12 months the right forecast window? The AI made reasonable defaults, but the data scientist must confirm they match the experiment design.</a:t>
             </a:r>
           </a:p>
         </p:txBody>
@@ -11405,7 +11405,7 @@
                 </a:solidFill>
                 <a:latin typeface="Segoe UI"/>
               </a:rPr>
-              <a:t>SQL Workflow</a:t>
+              <a:t>SQL Workflow (BI) -- Before And After</a:t>
             </a:r>
           </a:p>
         </p:txBody>
@@ -11534,7 +11534,7 @@
                 </a:solidFill>
                 <a:latin typeface="Segoe UI"/>
               </a:rPr>
-              <a:t>explain joins, filters, aggregations</a:t>
+              <a:t>Scenario: Copilot adds documentation and a guard to a revenue report query.</a:t>
             </a:r>
           </a:p>
           <a:p>
@@ -11562,7 +11562,7 @@
                 </a:solidFill>
                 <a:latin typeface="Segoe UI"/>
               </a:rPr>
-              <a:t>preserve business meaning</a:t>
+              <a:t>Review: Is the **net revenue definition** correct? Is `prior_month_revenue` useful or noise?</a:t>
             </a:r>
           </a:p>
           <a:p>
@@ -11590,7 +11590,7 @@
                 </a:solidFill>
                 <a:latin typeface="Segoe UI"/>
               </a:rPr>
-              <a:t>request comments before optimization</a:t>
+              <a:t>Decision: Keep, Revise, or Reject?</a:t>
             </a:r>
           </a:p>
         </p:txBody>
@@ -11708,7 +11708,7 @@
                 </a:solidFill>
                 <a:latin typeface="Segoe UI"/>
               </a:rPr>
-              <a:t>Make it clear that optimization without business validation is not acceptable.</a:t>
+              <a:t>The AI added a business-definition comment, a prior-month column for context, a percentage calculation, and a divide-by-zero guard. Ask: does your team want the percentage column, or does it create confusion in the dashboard? More columns are not always better. The BI analyst must decide what the end report actually needs.</a:t>
             </a:r>
           </a:p>
         </p:txBody>
@@ -11906,7 +11906,7 @@
                 </a:solidFill>
                 <a:latin typeface="Segoe UI"/>
               </a:rPr>
-              <a:t>Pipeline Workflow</a:t>
+              <a:t>Pipeline Workflow (DE) -- Before And After</a:t>
             </a:r>
           </a:p>
         </p:txBody>
@@ -12035,7 +12035,7 @@
                 </a:solidFill>
                 <a:latin typeface="Segoe UI"/>
               </a:rPr>
-              <a:t>explain pipeline flow and upstream dependencies</a:t>
+              <a:t>Scenario: Copilot improves an Azure Data Factory pipeline activity definition.</a:t>
             </a:r>
           </a:p>
           <a:p>
@@ -12063,7 +12063,7 @@
                 </a:solidFill>
                 <a:latin typeface="Segoe UI"/>
               </a:rPr>
-              <a:t>identify failure points in daily ingestion or backfill runs</a:t>
+              <a:t>name: copy_orders</a:t>
             </a:r>
           </a:p>
           <a:p>
@@ -12091,7 +12091,63 @@
                 </a:solidFill>
                 <a:latin typeface="Segoe UI"/>
               </a:rPr>
-              <a:t>add validation or troubleshooting notes</a:t>
+              <a:t>name: copy_orders</a:t>
+            </a:r>
+          </a:p>
+          <a:p>
+            <a:pPr>
+              <a:spcBef>
+                <a:spcPts val="400"/>
+              </a:spcBef>
+              <a:spcAft>
+                <a:spcPts val="800"/>
+              </a:spcAft>
+            </a:pPr>
+            <a:r>
+              <a:rPr sz="1600">
+                <a:solidFill>
+                  <a:srgbClr val="0078D4"/>
+                </a:solidFill>
+                <a:latin typeface="Segoe UI"/>
+              </a:rPr>
+              <a:t>●  </a:t>
+            </a:r>
+            <a:r>
+              <a:rPr sz="1800">
+                <a:solidFill>
+                  <a:srgbClr val="2C3E50"/>
+                </a:solidFill>
+                <a:latin typeface="Segoe UI"/>
+              </a:rPr>
+              <a:t>Review: Is `SELECT *` removal correct? Is the 3-day lookback right for your load pattern?</a:t>
+            </a:r>
+          </a:p>
+          <a:p>
+            <a:pPr>
+              <a:spcBef>
+                <a:spcPts val="400"/>
+              </a:spcBef>
+              <a:spcAft>
+                <a:spcPts val="800"/>
+              </a:spcAft>
+            </a:pPr>
+            <a:r>
+              <a:rPr sz="1600">
+                <a:solidFill>
+                  <a:srgbClr val="0078D4"/>
+                </a:solidFill>
+                <a:latin typeface="Segoe UI"/>
+              </a:rPr>
+              <a:t>●  </a:t>
+            </a:r>
+            <a:r>
+              <a:rPr sz="1800">
+                <a:solidFill>
+                  <a:srgbClr val="2C3E50"/>
+                </a:solidFill>
+                <a:latin typeface="Segoe UI"/>
+              </a:rPr>
+              <a:t>Decision: Keep, Revise, or Reject?</a:t>
             </a:r>
           </a:p>
         </p:txBody>
@@ -12209,7 +12265,7 @@
                 </a:solidFill>
                 <a:latin typeface="Segoe UI"/>
               </a:rPr>
-              <a:t>Operational reliability is the main risk here.</a:t>
+              <a:t>The AI replaced `SELECT *` with explicit columns, added a date filter with a 3-day lookback, date-partitioned the sink path, and added retry and timeout policies. Ask: is 3 days the right window? Does your team use date-partitioned paths? The changes look professional but every parameter needs validation against the actual pipeline SLA.</a:t>
             </a:r>
           </a:p>
         </p:txBody>
